--- a/Milestone Files/Milestone 2/Milestone2 Presentation.pptx
+++ b/Milestone Files/Milestone 2/Milestone2 Presentation.pptx
@@ -202,6 +202,14 @@
           </a:p>
         </c:rich>
       </c:tx>
+      <c:layout>
+        <c:manualLayout>
+          <c:xMode val="edge"/>
+          <c:yMode val="edge"/>
+          <c:x val="0.22835097001763668"/>
+          <c:y val="2.4509803921568627E-2"/>
+        </c:manualLayout>
+      </c:layout>
       <c:overlay val="0"/>
     </c:title>
     <c:autoTitleDeleted val="0"/>
@@ -4374,7 +4382,29 @@
                 <a:ea typeface="Courier New" pitchFamily="34" charset="-122"/>
                 <a:cs typeface="Courier New" pitchFamily="34" charset="-120"/>
               </a:rPr>
-              <a:t>temperature 0.1  ·  top_p 1  ·  seed 42  ·  max_tokens 2048</a:t>
+              <a:t>temperature 0.1  ·  </a:t>
+            </a:r>
+            <a:r>
+              <a:rPr lang="en-US" sz="1000" dirty="0" err="1">
+                <a:solidFill>
+                  <a:srgbClr val="9FB0CC"/>
+                </a:solidFill>
+                <a:latin typeface="Courier New" pitchFamily="34" charset="0"/>
+                <a:ea typeface="Courier New" pitchFamily="34" charset="-122"/>
+                <a:cs typeface="Courier New" pitchFamily="34" charset="-120"/>
+              </a:rPr>
+              <a:t>top_p</a:t>
+            </a:r>
+            <a:r>
+              <a:rPr lang="en-US" sz="1000" dirty="0">
+                <a:solidFill>
+                  <a:srgbClr val="9FB0CC"/>
+                </a:solidFill>
+                <a:latin typeface="Courier New" pitchFamily="34" charset="0"/>
+                <a:ea typeface="Courier New" pitchFamily="34" charset="-122"/>
+                <a:cs typeface="Courier New" pitchFamily="34" charset="-120"/>
+              </a:rPr>
+              <a:t> 0.95  ·  seed 42  ·  max_tokens 2048</a:t>
             </a:r>
             <a:endParaRPr lang="en-US" sz="1000" dirty="0"/>
           </a:p>
@@ -4746,7 +4776,7 @@
         </p:nvSpPr>
         <p:spPr>
           <a:xfrm>
-            <a:off x="5989320" y="6172200"/>
+            <a:off x="5989320" y="6168875"/>
             <a:ext cx="5577840" cy="274320"/>
           </a:xfrm>
           <a:prstGeom prst="rect">
@@ -4763,7 +4793,7 @@
               <a:buNone/>
             </a:pPr>
             <a:r>
-              <a:rPr lang="en-US" sz="1000" dirty="0">
+              <a:rPr lang="en-US" sz="1000" dirty="0" err="1">
                 <a:solidFill>
                   <a:srgbClr val="6B7686"/>
                 </a:solidFill>
@@ -4771,7 +4801,18 @@
                 <a:ea typeface="Courier New" pitchFamily="34" charset="-122"/>
                 <a:cs typeface="Courier New" pitchFamily="34" charset="-120"/>
               </a:rPr>
-              <a:t>compress_context_with_glm(context, question, client)</a:t>
+              <a:t>compress_context</a:t>
+            </a:r>
+            <a:r>
+              <a:rPr lang="en-US" sz="1000" dirty="0">
+                <a:solidFill>
+                  <a:srgbClr val="6B7686"/>
+                </a:solidFill>
+                <a:latin typeface="Courier New" pitchFamily="34" charset="0"/>
+                <a:ea typeface="Courier New" pitchFamily="34" charset="-122"/>
+                <a:cs typeface="Courier New" pitchFamily="34" charset="-120"/>
+              </a:rPr>
+              <a:t>(context, question, client)</a:t>
             </a:r>
             <a:endParaRPr lang="en-US" sz="1000" dirty="0"/>
           </a:p>
@@ -4896,7 +4937,7 @@
         </p:nvSpPr>
         <p:spPr>
           <a:xfrm>
-            <a:off x="548640" y="1207008"/>
+            <a:off x="548640" y="1198695"/>
             <a:ext cx="10058400" cy="365760"/>
           </a:xfrm>
           <a:prstGeom prst="rect">
@@ -6162,11 +6203,8 @@
           <a:bodyPr wrap="square" lIns="0" tIns="0" rIns="0" bIns="0" rtlCol="0" anchor="ctr"/>
           <a:lstStyle/>
           <a:p>
-            <a:pPr marL="0" indent="0">
-              <a:buNone/>
-            </a:pPr>
-            <a:r>
-              <a:rPr lang="en-US" sz="1250" b="1" dirty="0">
+            <a:r>
+              <a:rPr lang="en-US" sz="1250" b="1" dirty="0" err="1">
                 <a:solidFill>
                   <a:srgbClr val="1B2A4A"/>
                 </a:solidFill>
@@ -6174,7 +6212,18 @@
                 <a:ea typeface="Courier New" pitchFamily="34" charset="-122"/>
                 <a:cs typeface="Courier New" pitchFamily="34" charset="-120"/>
               </a:rPr>
-              <a:t>generate_labels(original, compressed)</a:t>
+              <a:t>align_tokens</a:t>
+            </a:r>
+            <a:r>
+              <a:rPr lang="en-US" sz="1250" b="1" dirty="0">
+                <a:solidFill>
+                  <a:srgbClr val="1B2A4A"/>
+                </a:solidFill>
+                <a:latin typeface="Courier New" pitchFamily="34" charset="0"/>
+                <a:ea typeface="Courier New" pitchFamily="34" charset="-122"/>
+                <a:cs typeface="Courier New" pitchFamily="34" charset="-120"/>
+              </a:rPr>
+              <a:t>(original, compressed)</a:t>
             </a:r>
             <a:endParaRPr lang="en-US" sz="1250" dirty="0"/>
           </a:p>
@@ -7786,10 +7835,16 @@
         <p:nvGraphicFramePr>
           <p:cNvPr id="5" name="Chart 0"/>
           <p:cNvGraphicFramePr/>
-          <p:nvPr/>
+          <p:nvPr>
+            <p:extLst>
+              <p:ext uri="{D42A27DB-BD31-4B8C-83A1-F6EECF244321}">
+                <p14:modId xmlns:p14="http://schemas.microsoft.com/office/powerpoint/2010/main" val="3037350310"/>
+              </p:ext>
+            </p:extLst>
+          </p:nvPr>
         </p:nvGraphicFramePr>
         <p:xfrm>
-          <a:off x="548640" y="1828800"/>
+          <a:off x="407324" y="1968454"/>
           <a:ext cx="5760720" cy="3108960"/>
         </p:xfrm>
         <a:graphic>
@@ -7806,7 +7861,7 @@
         </p:nvSpPr>
         <p:spPr>
           <a:xfrm>
-            <a:off x="6629400" y="1828800"/>
+            <a:off x="6446520" y="1938528"/>
             <a:ext cx="2788920" cy="1325880"/>
           </a:xfrm>
           <a:prstGeom prst="roundRect">
@@ -7948,7 +8003,7 @@
         </p:nvSpPr>
         <p:spPr>
           <a:xfrm>
-            <a:off x="9601200" y="1828800"/>
+            <a:off x="9403080" y="1938528"/>
             <a:ext cx="2788920" cy="1325880"/>
           </a:xfrm>
           <a:prstGeom prst="roundRect">
@@ -8090,7 +8145,7 @@
         </p:nvSpPr>
         <p:spPr>
           <a:xfrm>
-            <a:off x="6629400" y="3337560"/>
+            <a:off x="6490162" y="3397411"/>
             <a:ext cx="2788920" cy="1325880"/>
           </a:xfrm>
           <a:prstGeom prst="roundRect">
@@ -8232,7 +8287,7 @@
         </p:nvSpPr>
         <p:spPr>
           <a:xfrm>
-            <a:off x="9601200" y="3337560"/>
+            <a:off x="9403080" y="3429000"/>
             <a:ext cx="2788920" cy="1325880"/>
           </a:xfrm>
           <a:prstGeom prst="roundRect">
@@ -8368,59 +8423,6 @@
       </p:sp>
       <p:sp>
         <p:nvSpPr>
-          <p:cNvPr id="22" name="Shape 19"/>
-          <p:cNvSpPr/>
-          <p:nvPr/>
-        </p:nvSpPr>
-        <p:spPr>
-          <a:xfrm>
-            <a:off x="548640" y="5141421"/>
-            <a:ext cx="11064240" cy="1234440"/>
-          </a:xfrm>
-          <a:prstGeom prst="roundRect">
-            <a:avLst>
-              <a:gd name="adj" fmla="val 7407"/>
-            </a:avLst>
-          </a:prstGeom>
-          <a:solidFill>
-            <a:srgbClr val="0E7C7B"/>
-          </a:solidFill>
-          <a:ln/>
-          <a:effectLst>
-            <a:outerShdw blurRad="101600" dist="38100" dir="2700000" algn="bl" rotWithShape="0">
-              <a:srgbClr val="000000">
-                <a:alpha val="12000"/>
-              </a:srgbClr>
-            </a:outerShdw>
-          </a:effectLst>
-        </p:spPr>
-      </p:sp>
-      <p:pic>
-        <p:nvPicPr>
-          <p:cNvPr id="23" name="Image 0" descr="icons/check_white.png"/>
-          <p:cNvPicPr>
-            <a:picLocks noChangeAspect="1"/>
-          </p:cNvPicPr>
-          <p:nvPr/>
-        </p:nvPicPr>
-        <p:blipFill>
-          <a:blip r:embed="rId4"/>
-          <a:stretch>
-            <a:fillRect/>
-          </a:stretch>
-        </p:blipFill>
-        <p:spPr>
-          <a:xfrm>
-            <a:off x="868680" y="5486400"/>
-            <a:ext cx="502920" cy="502920"/>
-          </a:xfrm>
-          <a:prstGeom prst="rect">
-            <a:avLst/>
-          </a:prstGeom>
-        </p:spPr>
-      </p:pic>
-      <p:sp>
-        <p:nvSpPr>
           <p:cNvPr id="24" name="Text 20"/>
           <p:cNvSpPr/>
           <p:nvPr/>
@@ -8446,28 +8448,6 @@
               </a:lnSpc>
               <a:buNone/>
             </a:pPr>
-            <a:r>
-              <a:rPr lang="en-US" sz="1250" b="1" dirty="0">
-                <a:solidFill>
-                  <a:srgbClr val="FFFFFF"/>
-                </a:solidFill>
-                <a:latin typeface="Calibri" pitchFamily="34" charset="0"/>
-                <a:ea typeface="Calibri" pitchFamily="34" charset="-122"/>
-                <a:cs typeface="Calibri" pitchFamily="34" charset="-120"/>
-              </a:rPr>
-              <a:t>Ready for the next milestone: </a:t>
-            </a:r>
-            <a:r>
-              <a:rPr lang="en-US" sz="1250" dirty="0">
-                <a:solidFill>
-                  <a:srgbClr val="FFFFFF"/>
-                </a:solidFill>
-                <a:latin typeface="Calibri" pitchFamily="34" charset="0"/>
-                <a:ea typeface="Calibri" pitchFamily="34" charset="-122"/>
-                <a:cs typeface="Calibri" pitchFamily="34" charset="-120"/>
-              </a:rPr>
-              <a:t>the labelled train / validation sets cut prompt size by ~96% while keeping the correct answer in over 9 of every 10 examples — a strong signal for training a lightweight token-classification compressor.</a:t>
-            </a:r>
             <a:endParaRPr lang="en-US" sz="1250" dirty="0"/>
           </a:p>
         </p:txBody>
